--- a/docs/교재/실전반_오프라인/05회차/실전반_오프라인_05회차.pptx
+++ b/docs/교재/실전반_오프라인/05회차/실전반_오프라인_05회차.pptx
@@ -6414,7 +6414,7 @@
       </p:sp>
       <p:pic>
         <p:nvPicPr>
-          <p:cNvPr id="6" name="삽화:스킬문서.svg" descr="illust_8669779339663410440_1791735675.png"/>
+          <p:cNvPr id="6" name="삽화:스킬문서.svg" descr="illust_2989509027022708602_1791735675.png"/>
           <p:cNvPicPr>
             <a:picLocks noChangeAspect="1"/>
           </p:cNvPicPr>
@@ -9427,7 +9427,7 @@
       </p:sp>
       <p:pic>
         <p:nvPicPr>
-          <p:cNvPr id="6" name="삽화:연결의수.svg" descr="illust_2135869722585533124_1791735675.png"/>
+          <p:cNvPr id="6" name="삽화:연결의수.svg" descr="illust_8420265596540129690_1791735675.png"/>
           <p:cNvPicPr>
             <a:picLocks noChangeAspect="1"/>
           </p:cNvPicPr>
@@ -10598,7 +10598,7 @@
       </p:sp>
       <p:pic>
         <p:nvPicPr>
-          <p:cNvPr id="6" name="삽화:MCP구성.svg" descr="illust_3795958155593374717_1791735675.png"/>
+          <p:cNvPr id="6" name="삽화:MCP구성.svg" descr="illust_697038937212648310_1791735675.png"/>
           <p:cNvPicPr>
             <a:picLocks noChangeAspect="1"/>
           </p:cNvPicPr>
@@ -12113,7 +12113,7 @@
       </p:sp>
       <p:pic>
         <p:nvPicPr>
-          <p:cNvPr id="6" name="삽화:목록호출.svg" descr="illust_3743192798356453789_1791735675.png"/>
+          <p:cNvPr id="6" name="삽화:목록호출.svg" descr="illust_3918815642715367141_1791735675.png"/>
           <p:cNvPicPr>
             <a:picLocks noChangeAspect="1"/>
           </p:cNvPicPr>
@@ -19074,7 +19074,7 @@
       </p:sp>
       <p:pic>
         <p:nvPicPr>
-          <p:cNvPr id="6" name="삽화:세겹.svg" descr="illust_3856729683496410078_1791735675.png"/>
+          <p:cNvPr id="6" name="삽화:세겹.svg" descr="illust_1491086845087237501_1791735675.png"/>
           <p:cNvPicPr>
             <a:picLocks noChangeAspect="1"/>
           </p:cNvPicPr>
@@ -25431,7 +25431,7 @@
                 <a:ea typeface="맑은 고딕"/>
                 <a:cs typeface="맑은 고딕"/>
               </a:rPr>
-              <a:t>Markdown과 JSON으로 만들고 회의록 원문과 대조해 검토한다</a:t>
+              <a:t>Markdown으로 만들고 회의록 원문과 대조해 검토한다</a:t>
             </a:r>
           </a:p>
         </p:txBody>
@@ -32589,7 +32589,7 @@
       </p:sp>
       <p:pic>
         <p:nvPicPr>
-          <p:cNvPr id="6" name="삽화:고리_1.svg" descr="illust_4870720114100004888_1791735675.png"/>
+          <p:cNvPr id="6" name="삽화:고리_1.svg" descr="illust_1877706970141785775_1791735675.png"/>
           <p:cNvPicPr>
             <a:picLocks noChangeAspect="1"/>
           </p:cNvPicPr>

--- a/docs/교재/실전반_오프라인/05회차/실전반_오프라인_05회차.pptx
+++ b/docs/교재/실전반_오프라인/05회차/실전반_오프라인_05회차.pptx
@@ -2432,7 +2432,7 @@
           <a:lstStyle/>
           <a:p>
             <a:r>
-              <a:t>그렇게 적어 둔 지침을 에이전트 스킬, Agent Skill이라고 합니다. 스킬의 본체는 SKILL.md라는 파일 하나이고, 스킬 이름과 같은 폴더 안에 놓입니다. HYD에서 쿨러 과열 경보에 쓰는 스킬의 이름은 cooling-emergency-response입니다.</a:t>
+              <a:t>그렇게 적어 둔 지침을 에이전트 스킬, Agent Skill이라고 합니다. 스킬의 본체는 SKILL.md라는 파일 하나이고, 스킬 이름과 같은 폴더 안에 놓입니다. HYD에서 쿨러 성능 저하 경보에 쓰는 스킬의 이름은 cooling-emergency-response입니다.</a:t>
             </a:r>
           </a:p>
         </p:txBody>
@@ -6414,7 +6414,7 @@
       </p:sp>
       <p:pic>
         <p:nvPicPr>
-          <p:cNvPr id="6" name="삽화:스킬문서.svg" descr="illust_2989509027022708602_1791735675.png"/>
+          <p:cNvPr id="6" name="삽화:스킬문서.svg" descr="illust_7687404377547191205_1791735675.png"/>
           <p:cNvPicPr>
             <a:picLocks noChangeAspect="1"/>
           </p:cNvPicPr>
@@ -9427,7 +9427,7 @@
       </p:sp>
       <p:pic>
         <p:nvPicPr>
-          <p:cNvPr id="6" name="삽화:연결의수.svg" descr="illust_8420265596540129690_1791735675.png"/>
+          <p:cNvPr id="6" name="삽화:연결의수.svg" descr="illust_1838324796556139237_1791735675.png"/>
           <p:cNvPicPr>
             <a:picLocks noChangeAspect="1"/>
           </p:cNvPicPr>
@@ -10598,7 +10598,7 @@
       </p:sp>
       <p:pic>
         <p:nvPicPr>
-          <p:cNvPr id="6" name="삽화:MCP구성.svg" descr="illust_697038937212648310_1791735675.png"/>
+          <p:cNvPr id="6" name="삽화:MCP구성.svg" descr="illust_388268780624301403_1791735675.png"/>
           <p:cNvPicPr>
             <a:picLocks noChangeAspect="1"/>
           </p:cNvPicPr>
@@ -12113,7 +12113,7 @@
       </p:sp>
       <p:pic>
         <p:nvPicPr>
-          <p:cNvPr id="6" name="삽화:목록호출.svg" descr="illust_3918815642715367141_1791735675.png"/>
+          <p:cNvPr id="6" name="삽화:목록호출.svg" descr="illust_2788587839240657667_1791735675.png"/>
           <p:cNvPicPr>
             <a:picLocks noChangeAspect="1"/>
           </p:cNvPicPr>
@@ -14014,7 +14014,7 @@
                 <a:ea typeface="맑은 고딕"/>
                 <a:cs typeface="맑은 고딕"/>
               </a:rPr>
-              <a:t>• 스킬 파일의 머리말, 절차, 결과가 맡는 일을 원문에서 짚는다</a:t>
+              <a:t>• 스킬 파일의 머리말과 절차, 결과가 맡는 일을 원문에서 짚는다</a:t>
             </a:r>
           </a:p>
           <a:p>
@@ -14254,7 +14254,7 @@
                 <a:ea typeface="맑은 고딕"/>
                 <a:cs typeface="맑은 고딕"/>
               </a:rPr>
-              <a:t>• 호스트, 클라이언트, 서버, 도구의 관계를 설명한다</a:t>
+              <a:t>• 호스트와 클라이언트, 서버와 도구의 관계를 설명한다</a:t>
             </a:r>
           </a:p>
           <a:p>
@@ -19074,7 +19074,7 @@
       </p:sp>
       <p:pic>
         <p:nvPicPr>
-          <p:cNvPr id="6" name="삽화:세겹.svg" descr="illust_1491086845087237501_1791735675.png"/>
+          <p:cNvPr id="6" name="삽화:세겹.svg" descr="illust_6269749884118833351_1791735675.png"/>
           <p:cNvPicPr>
             <a:picLocks noChangeAspect="1"/>
           </p:cNvPicPr>
@@ -32589,7 +32589,7 @@
       </p:sp>
       <p:pic>
         <p:nvPicPr>
-          <p:cNvPr id="6" name="삽화:고리_1.svg" descr="illust_1877706970141785775_1791735675.png"/>
+          <p:cNvPr id="6" name="삽화:고리_1.svg" descr="illust_815611649989032360_1791735675.png"/>
           <p:cNvPicPr>
             <a:picLocks noChangeAspect="1"/>
           </p:cNvPicPr>
@@ -33644,7 +33644,7 @@
                 <a:ea typeface="맑은 고딕"/>
                 <a:cs typeface="맑은 고딕"/>
               </a:rPr>
-              <a:t>쿨러 과열 경보에 쓰는 스킬의 이름은 cooling-emergency-response이다.</a:t>
+              <a:t>쿨러 성능 저하 경보에 쓰는 스킬의 이름은 cooling-emergency-response이다.</a:t>
             </a:r>
           </a:p>
         </p:txBody>

--- a/docs/교재/실전반_오프라인/05회차/실전반_오프라인_05회차.pptx
+++ b/docs/교재/실전반_오프라인/05회차/실전반_오프라인_05회차.pptx
@@ -542,7 +542,7 @@
           <a:lstStyle/>
           <a:p>
             <a:r>
-              <a:t>앞 회차에서는 에이전트가 도구를 부르며 일하는 모습을 보았습니다. 오늘은 그 에이전트가 일하는 방법을 어디에 적어 두는지, 도구는 어떻게 연결되는지, 연결할 때 무엇을 지켜야 하는지를 차례로 다룹니다. 이 네 가지를 자료 없이 자신의 말로 설명할 수 있는지가 오늘의 기준입니다.</a:t>
+              <a:t>앞 회차에서는 에이전트가 도구를 부르며 일하는 모습을 보았습니다. 오늘은 그 에이전트가 일하는 방법을 어디에 적어 두는지, 도구는 어떻게 연결되는지, 연결할 때 무엇을 지켜야 하는지를 차례로 다룹니다. 수업이 끝났을 때 SKILL.md 한 편과 서버 설정 한 건을 놓고 어디에 무엇이 적혀 있는지를 짚을 수 있어야 합니다.</a:t>
             </a:r>
           </a:p>
         </p:txBody>
@@ -1032,7 +1032,7 @@
           <a:lstStyle/>
           <a:p>
             <a:r>
-              <a:t>도구 목록에 든 항목 하나를 그대로 옮겼습니다. 구매 쪽 서버가 내주는 part_quotes라는 도구입니다. 이름과 설명과 입력 스키마가 있고, 모델은 이 설명을 읽고 지금 이 도구를 부를지를 정합니다. 그래서 도구의 설명은 사람이 읽는 주석이 아니라 모델의 선택을 좌우하는 글입니다.</a:t>
+              <a:t>도구 목록에 든 항목 하나를 그대로 옮겼습니다. 구매 쪽 업무 DB 서버가 내주는 part_quotes라는 도구입니다. 이름과 설명과 입력 스키마가 있고, 모델은 이 설명을 읽고 지금 이 도구를 부를지를 정합니다. 그래서 도구의 설명은 사람이 읽는 주석이 아니라 모델의 선택을 좌우하는 글입니다.</a:t>
             </a:r>
           </a:p>
         </p:txBody>
@@ -1102,7 +1102,7 @@
           <a:lstStyle/>
           <a:p>
             <a:r>
-              <a:t>업무 DB 서버의 mes_orders를 HYD-01로 불렀을 때 돌아온 응답입니다. 맨 앞의 result가 성공 여부를 알리고, document 안에 읽은 시각과 값이 들어 있습니다. facts는 판단에 바로 쓰는 값이고 records는 업무 DB에서 읽은 원래의 행입니다. 납기 오더 MO-0930-0412가 5.98시간 남았다는 값이 여기서 나왔습니다.</a:t>
+              <a:t>업무 DB 서버의 mes_orders를 HYD-01로 불렀을 때 돌아온 응답입니다. 여기서 볼 것은 값 자체가 아니라 값을 싸고 있는 응답의 모양입니다. 맨 앞의 result가 성공 여부를 알리고, document 안에 값을 읽은 시각 as_of가 들어 있습니다. facts는 판단에 바로 쓰는 값만 추린 자리이고 records는 업무 DB에서 읽은 원래의 행입니다. 납기까지 5.98시간이라는 값은 이 모양에 담겨 돌아온 것입니다.</a:t>
             </a:r>
           </a:p>
         </p:txBody>
@@ -1592,7 +1592,7 @@
           <a:lstStyle/>
           <a:p>
             <a:r>
-              <a:t>에이전트에게 주는 허용 목록의 실제 내용입니다. 지식 그래프 쪽은 조회 도구 둘의 이름만 올라 있습니다. 별표는 그 서버의 도구 전부를 뜻하며, 미리 검사해 둔 기준 서버에만 씁니다. 학생이 새로 등록한 서버는 별표를 쓰지 않고 읽기로 인정된 도구의 이름만 하나씩 올립니다.</a:t>
+              <a:t>권한 제한의 기준이 되는 허용 목록의 실제 내용입니다. 지식 그래프 쪽은 조회 도구 둘의 이름만 올라 있습니다. 별표는 그 서버의 도구 전부를 뜻하며, 미리 검사해 둔 기준 서버에만 씁니다. 학생이 새로 등록한 서버는 별표를 쓰지 않고 읽기로 인정된 도구의 이름만 하나씩 올립니다.</a:t>
             </a:r>
           </a:p>
         </p:txBody>
@@ -1662,7 +1662,7 @@
           <a:lstStyle/>
           <a:p>
             <a:r>
-              <a:t>응답의 네 가지 경우를 구분합니다. 조회가 성공했는데 결과가 0행이면 「없음」이 사실입니다. 호출이 실패했거나 정해진 시간을 넘겼으면 값이 있는지 없는지를 알 수 없으므로 실패로 적어야 합니다. 실패를 0이나 빈 값으로 바꾸면 재고가 없다는 틀린 사실이 판단에 들어갑니다. 응답이 잘렸을 때는 읽지 못한 범위를 밝힙니다.</a:t>
+              <a:t>값이 없는 것과 조회에 실패한 것은 에이전트의 멈춤 조건에서 이미 구분했고, 위의 두 줄이 그것입니다. 도구를 연결해 쓰면 경우가 둘 더 생깁니다. 정해진 시간 안에 응답하지 못한 호출은 오류로 돌아오므로 실패로 적고, 응답이 잘렸을 때는 읽지 못한 범위를 밝힙니다. 어느 경우에도 0이나 빈 값으로 바꾸어 적지 않습니다.</a:t>
             </a:r>
           </a:p>
         </p:txBody>
@@ -2012,7 +2012,7 @@
           <a:lstStyle/>
           <a:p>
             <a:r>
-              <a:t>오늘 나온 약어와 영문 용어의 정식 명칭을 한곳에 모았습니다. 이 넷과 함께 호스트, 클라이언트, 서버, 도구, 입력 스키마, 허용 목록이 오늘의 용어입니다. 하나를 골라 자료를 덮고 자신의 문장으로 써 보시기 바랍니다.</a:t>
+              <a:t>오늘 나온 약어와 영문 용어의 정식 명칭을 한곳에 모았습니다. 이 넷과 함께 호스트, 클라이언트, 서버, 도구, 입력 스키마, 허용 목록이 오늘의 용어입니다. 용어마다 스킬 쪽의 말인지 연결 쪽의 말인지를 갈라 보시기 바랍니다.</a:t>
             </a:r>
           </a:p>
         </p:txBody>
@@ -2362,7 +2362,7 @@
           <a:lstStyle/>
           <a:p>
             <a:r>
-              <a:t>정답보다 판단 기준이 중요합니다. 첫 문항의 1번과 3번은 스킬을 고치는 일이어서 빠진 연결을 채우지 못합니다. 둘째 문항의 1번은 실패를 값 없음으로 바꾼 것입니다. 셋째 문항의 2번은 표시가 없는 도구를 읽기로 본 것이며, 표시가 없으면 읽는 도구인지 알 수 없으므로 거절됩니다.</a:t>
+              <a:t>오답이 어느 구분을 놓쳤는지를 함께 짚습니다. 첫 문항의 1번과 3번은 스킬을 고치는 일이어서 빠진 연결을 채우지 못합니다. 둘째 문항의 1번은 실패를 값 없음으로 바꾼 것입니다. 셋째 문항의 2번은 표시가 없는 도구를 읽기로 본 것이며, 표시가 없으면 읽는 도구인지 알 수 없으므로 거절됩니다.</a:t>
             </a:r>
           </a:p>
         </p:txBody>
@@ -2502,7 +2502,7 @@
           <a:lstStyle/>
           <a:p>
             <a:r>
-              <a:t>에이전트가 실제로 읽은 SKILL.md의 앞부분입니다. 줄 세 개짜리 구분선 사이가 머리말이고, 이름과 설명 두 항목이 들어 있습니다. 그 아래 본문은 경보 한 건에서 원인을 진단하고 조치 후보를 비교해 추천 카드와 대안을 올린다는 요약으로 시작합니다. 마지막 두 줄은 이 스킬이 조회와 계산까지만 한다는 범위의 한계입니다.</a:t>
+              <a:t>에이전트가 실제로 읽은 SKILL.md의 앞부분입니다. 줄 세 개짜리 구분선 사이가 머리말이고, 이름과 설명 두 항목이 들어 있습니다. 그 아래 본문은 경보 한 건에서 원인을 진단하고 조치 후보를 비교해 추천 카드와 대안을 올린다는 요약으로 시작합니다. 원문의 「추천 카드」가 곧 추천안이고, 「쿨러 과열 경보」는 쿨러 성능 저하 경보를 가리킵니다. 마지막 두 줄은 이 스킬이 조회와 계산까지만 한다는 범위의 한계입니다.</a:t>
             </a:r>
           </a:p>
         </p:txBody>
@@ -2712,7 +2712,7 @@
           <a:lstStyle/>
           <a:p>
             <a:r>
-              <a:t>위는 SKILL.md의 결과 절이고 아래는 에이전트가 실제로 쓴 출력 파일입니다. 결과 절에 적힌 다섯 항목이 출력의 최상위 항목과 하나씩 맞습니다. 항목의 이름이 정해져 있어서 사람에게 승인을 받는 다음 단계가 실행마다 같은 이름으로 값을 읽습니다. 추천 값 skill:sop-cool-11은 팬 최대 운전을 가리키는 식별자입니다.</a:t>
+              <a:t>위는 SKILL.md의 결과 절이고 아래는 에이전트가 실제로 쓴 출력 파일입니다. 구조화 출력의 다섯 항목은 이 결과 절이 이름을 정해 둔 것이어서, 사람에게 승인을 받는 다음 단계가 실행마다 같은 이름으로 값을 읽습니다. 추천 값 skill:sop-cool-11은 팬 최대 운전을 가리키는 식별자입니다. 이 파일은 같은 스킬로 처리한 같은 종류의 다른 쿨러 경보 한 건의 기록이어서, 판단 번호가 앞 회차에서 본 사건의 것과 다릅니다.</a:t>
             </a:r>
           </a:p>
         </p:txBody>
@@ -6414,7 +6414,7 @@
       </p:sp>
       <p:pic>
         <p:nvPicPr>
-          <p:cNvPr id="6" name="삽화:스킬문서.svg" descr="illust_7687404377547191205_1791735675.png"/>
+          <p:cNvPr id="6" name="삽화:스킬문서.svg" descr="illust_2540520335921322077_1791735675.png"/>
           <p:cNvPicPr>
             <a:picLocks noChangeAspect="1"/>
           </p:cNvPicPr>
@@ -9427,7 +9427,7 @@
       </p:sp>
       <p:pic>
         <p:nvPicPr>
-          <p:cNvPr id="6" name="삽화:연결의수.svg" descr="illust_1838324796556139237_1791735675.png"/>
+          <p:cNvPr id="6" name="삽화:연결의수.svg" descr="illust_806499503508165434_1791735675.png"/>
           <p:cNvPicPr>
             <a:picLocks noChangeAspect="1"/>
           </p:cNvPicPr>
@@ -10598,7 +10598,7 @@
       </p:sp>
       <p:pic>
         <p:nvPicPr>
-          <p:cNvPr id="6" name="삽화:MCP구성.svg" descr="illust_388268780624301403_1791735675.png"/>
+          <p:cNvPr id="6" name="삽화:MCP구성.svg" descr="illust_6170288006666810414_1791735675.png"/>
           <p:cNvPicPr>
             <a:picLocks noChangeAspect="1"/>
           </p:cNvPicPr>
@@ -12113,7 +12113,7 @@
       </p:sp>
       <p:pic>
         <p:nvPicPr>
-          <p:cNvPr id="6" name="삽화:목록호출.svg" descr="illust_2788587839240657667_1791735675.png"/>
+          <p:cNvPr id="6" name="삽화:목록호출.svg" descr="illust_5398848434339159910_1791735675.png"/>
           <p:cNvPicPr>
             <a:picLocks noChangeAspect="1"/>
           </p:cNvPicPr>
@@ -15366,7 +15366,7 @@
                 <a:ea typeface="맑은 고딕"/>
                 <a:cs typeface="맑은 고딕"/>
               </a:rPr>
-              <a:t>호출이 성공했는지를 먼저 알린다.</a:t>
+              <a:t>호출이 성공했는지를 먼저 알린다. 실패하면 error가 온다.</a:t>
             </a:r>
           </a:p>
         </p:txBody>
@@ -15492,7 +15492,7 @@
                 <a:ea typeface="맑은 고딕"/>
                 <a:cs typeface="맑은 고딕"/>
               </a:rPr>
-              <a:t>판단에 쓰는 값이다. 납기까지 5.98시간, 남은 수량 1500.</a:t>
+              <a:t>판단에 쓰는 값만 추린 자리이다.</a:t>
             </a:r>
           </a:p>
         </p:txBody>
@@ -19074,7 +19074,7 @@
       </p:sp>
       <p:pic>
         <p:nvPicPr>
-          <p:cNvPr id="6" name="삽화:세겹.svg" descr="illust_6269749884118833351_1791735675.png"/>
+          <p:cNvPr id="6" name="삽화:세겹.svg" descr="illust_4690728014645083076_1791735675.png"/>
           <p:cNvPicPr>
             <a:picLocks noChangeAspect="1"/>
           </p:cNvPicPr>
@@ -20315,7 +20315,7 @@
                 <a:ea typeface="맑은 고딕"/>
                 <a:cs typeface="맑은 고딕"/>
               </a:rPr>
-              <a:t>조회에 실패한 것을 0이나 빈 값으로 바꾸어 내면, 값이 없다는 틀린 사실이 판단에 들어간다.</a:t>
+              <a:t>값 없음과 실패의 구분에 더해, 시간을 넘긴 응답과 잘린 응답도 결과에 적는 법이 따로 정해져 있다.</a:t>
             </a:r>
           </a:p>
         </p:txBody>
@@ -20701,6 +20701,190 @@
             </a:avLst>
           </a:prstGeom>
           <a:solidFill>
+            <a:srgbClr val="F3F6F9"/>
+          </a:solidFill>
+          <a:ln>
+            <a:noFill/>
+          </a:ln>
+        </p:spPr>
+        <p:txBody>
+          <a:bodyPr rtlCol="0" anchor="ctr"/>
+          <a:lstStyle/>
+          <a:p>
+            <a:pPr algn="ctr"/>
+          </a:p>
+        </p:txBody>
+      </p:sp>
+      <p:sp>
+        <p:nvSpPr>
+          <p:cNvPr id="15" name="TextBox 14"/>
+          <p:cNvSpPr txBox="1"/>
+          <p:nvPr/>
+        </p:nvSpPr>
+        <p:spPr>
+          <a:xfrm>
+            <a:off x="685800" y="3278123"/>
+            <a:ext cx="2514600" cy="914400"/>
+          </a:xfrm>
+          <a:prstGeom prst="rect">
+            <a:avLst/>
+          </a:prstGeom>
+          <a:noFill/>
+        </p:spPr>
+        <p:txBody>
+          <a:bodyPr wrap="square" anchor="ctr"/>
+          <a:lstStyle/>
+          <a:p>
+            <a:pPr algn="l">
+              <a:lnSpc>
+                <a:spcPct val="110000"/>
+              </a:lnSpc>
+            </a:pPr>
+            <a:r>
+              <a:rPr sz="1600" b="1">
+                <a:solidFill>
+                  <a:srgbClr val="13294B"/>
+                </a:solidFill>
+                <a:latin typeface="맑은 고딕"/>
+                <a:ea typeface="맑은 고딕"/>
+                <a:cs typeface="맑은 고딕"/>
+              </a:rPr>
+              <a:t>호출이 실패했다</a:t>
+            </a:r>
+          </a:p>
+        </p:txBody>
+      </p:sp>
+      <p:sp>
+        <p:nvSpPr>
+          <p:cNvPr id="16" name="TextBox 15"/>
+          <p:cNvSpPr txBox="1"/>
+          <p:nvPr/>
+        </p:nvSpPr>
+        <p:spPr>
+          <a:xfrm>
+            <a:off x="3200400" y="3278123"/>
+            <a:ext cx="6156655" cy="914400"/>
+          </a:xfrm>
+          <a:prstGeom prst="rect">
+            <a:avLst/>
+          </a:prstGeom>
+          <a:noFill/>
+        </p:spPr>
+        <p:txBody>
+          <a:bodyPr wrap="square" anchor="ctr"/>
+          <a:lstStyle/>
+          <a:p>
+            <a:pPr algn="l">
+              <a:lnSpc>
+                <a:spcPct val="110000"/>
+              </a:lnSpc>
+            </a:pPr>
+            <a:r>
+              <a:rPr sz="1400" b="0">
+                <a:solidFill>
+                  <a:srgbClr val="1F2A3A"/>
+                </a:solidFill>
+                <a:latin typeface="맑은 고딕"/>
+                <a:ea typeface="맑은 고딕"/>
+                <a:cs typeface="맑은 고딕"/>
+              </a:rPr>
+              <a:t>result가 error이고</a:t>
+            </a:r>
+          </a:p>
+          <a:p>
+            <a:pPr algn="l">
+              <a:lnSpc>
+                <a:spcPct val="110000"/>
+              </a:lnSpc>
+            </a:pPr>
+            <a:r>
+              <a:rPr sz="1400" b="0">
+                <a:solidFill>
+                  <a:srgbClr val="1F2A3A"/>
+                </a:solidFill>
+                <a:latin typeface="맑은 고딕"/>
+                <a:ea typeface="맑은 고딕"/>
+                <a:cs typeface="맑은 고딕"/>
+              </a:rPr>
+              <a:t>사유가 message에 담겨 온다</a:t>
+            </a:r>
+          </a:p>
+        </p:txBody>
+      </p:sp>
+      <p:sp>
+        <p:nvSpPr>
+          <p:cNvPr id="17" name="TextBox 16"/>
+          <p:cNvSpPr txBox="1"/>
+          <p:nvPr/>
+        </p:nvSpPr>
+        <p:spPr>
+          <a:xfrm>
+            <a:off x="9448495" y="3278123"/>
+            <a:ext cx="2103120" cy="914400"/>
+          </a:xfrm>
+          <a:prstGeom prst="rect">
+            <a:avLst/>
+          </a:prstGeom>
+          <a:noFill/>
+        </p:spPr>
+        <p:txBody>
+          <a:bodyPr wrap="square" anchor="ctr"/>
+          <a:lstStyle/>
+          <a:p>
+            <a:pPr algn="l">
+              <a:lnSpc>
+                <a:spcPct val="110000"/>
+              </a:lnSpc>
+            </a:pPr>
+            <a:r>
+              <a:rPr sz="1250" b="1">
+                <a:solidFill>
+                  <a:srgbClr val="556175"/>
+                </a:solidFill>
+                <a:latin typeface="맑은 고딕"/>
+                <a:ea typeface="맑은 고딕"/>
+                <a:cs typeface="맑은 고딕"/>
+              </a:rPr>
+              <a:t>실패로 적는다</a:t>
+            </a:r>
+          </a:p>
+          <a:p>
+            <a:pPr algn="l">
+              <a:lnSpc>
+                <a:spcPct val="110000"/>
+              </a:lnSpc>
+            </a:pPr>
+            <a:r>
+              <a:rPr sz="1250" b="1">
+                <a:solidFill>
+                  <a:srgbClr val="556175"/>
+                </a:solidFill>
+                <a:latin typeface="맑은 고딕"/>
+                <a:ea typeface="맑은 고딕"/>
+                <a:cs typeface="맑은 고딕"/>
+              </a:rPr>
+              <a:t>0이나 빈 값으로 바꾸지 않는다</a:t>
+            </a:r>
+          </a:p>
+        </p:txBody>
+      </p:sp>
+      <p:sp>
+        <p:nvSpPr>
+          <p:cNvPr id="18" name="Rounded Rectangle 17"/>
+          <p:cNvSpPr/>
+          <p:nvPr/>
+        </p:nvSpPr>
+        <p:spPr>
+          <a:xfrm>
+            <a:off x="548640" y="4224527"/>
+            <a:ext cx="11094415" cy="850392"/>
+          </a:xfrm>
+          <a:prstGeom prst="roundRect">
+            <a:avLst>
+              <a:gd name="adj" fmla="val 8000"/>
+            </a:avLst>
+          </a:prstGeom>
+          <a:solidFill>
             <a:srgbClr val="E7F3FD"/>
           </a:solidFill>
           <a:ln>
@@ -20717,190 +20901,6 @@
       </p:sp>
       <p:sp>
         <p:nvSpPr>
-          <p:cNvPr id="15" name="TextBox 14"/>
-          <p:cNvSpPr txBox="1"/>
-          <p:nvPr/>
-        </p:nvSpPr>
-        <p:spPr>
-          <a:xfrm>
-            <a:off x="685800" y="3278123"/>
-            <a:ext cx="2514600" cy="914400"/>
-          </a:xfrm>
-          <a:prstGeom prst="rect">
-            <a:avLst/>
-          </a:prstGeom>
-          <a:noFill/>
-        </p:spPr>
-        <p:txBody>
-          <a:bodyPr wrap="square" anchor="ctr"/>
-          <a:lstStyle/>
-          <a:p>
-            <a:pPr algn="l">
-              <a:lnSpc>
-                <a:spcPct val="110000"/>
-              </a:lnSpc>
-            </a:pPr>
-            <a:r>
-              <a:rPr sz="1600" b="1">
-                <a:solidFill>
-                  <a:srgbClr val="13294B"/>
-                </a:solidFill>
-                <a:latin typeface="맑은 고딕"/>
-                <a:ea typeface="맑은 고딕"/>
-                <a:cs typeface="맑은 고딕"/>
-              </a:rPr>
-              <a:t>호출이 실패했다</a:t>
-            </a:r>
-          </a:p>
-        </p:txBody>
-      </p:sp>
-      <p:sp>
-        <p:nvSpPr>
-          <p:cNvPr id="16" name="TextBox 15"/>
-          <p:cNvSpPr txBox="1"/>
-          <p:nvPr/>
-        </p:nvSpPr>
-        <p:spPr>
-          <a:xfrm>
-            <a:off x="3200400" y="3278123"/>
-            <a:ext cx="6156655" cy="914400"/>
-          </a:xfrm>
-          <a:prstGeom prst="rect">
-            <a:avLst/>
-          </a:prstGeom>
-          <a:noFill/>
-        </p:spPr>
-        <p:txBody>
-          <a:bodyPr wrap="square" anchor="ctr"/>
-          <a:lstStyle/>
-          <a:p>
-            <a:pPr algn="l">
-              <a:lnSpc>
-                <a:spcPct val="110000"/>
-              </a:lnSpc>
-            </a:pPr>
-            <a:r>
-              <a:rPr sz="1400" b="0">
-                <a:solidFill>
-                  <a:srgbClr val="1F2A3A"/>
-                </a:solidFill>
-                <a:latin typeface="맑은 고딕"/>
-                <a:ea typeface="맑은 고딕"/>
-                <a:cs typeface="맑은 고딕"/>
-              </a:rPr>
-              <a:t>result가 error이고</a:t>
-            </a:r>
-          </a:p>
-          <a:p>
-            <a:pPr algn="l">
-              <a:lnSpc>
-                <a:spcPct val="110000"/>
-              </a:lnSpc>
-            </a:pPr>
-            <a:r>
-              <a:rPr sz="1400" b="0">
-                <a:solidFill>
-                  <a:srgbClr val="1F2A3A"/>
-                </a:solidFill>
-                <a:latin typeface="맑은 고딕"/>
-                <a:ea typeface="맑은 고딕"/>
-                <a:cs typeface="맑은 고딕"/>
-              </a:rPr>
-              <a:t>사유가 message에 담겨 온다</a:t>
-            </a:r>
-          </a:p>
-        </p:txBody>
-      </p:sp>
-      <p:sp>
-        <p:nvSpPr>
-          <p:cNvPr id="17" name="TextBox 16"/>
-          <p:cNvSpPr txBox="1"/>
-          <p:nvPr/>
-        </p:nvSpPr>
-        <p:spPr>
-          <a:xfrm>
-            <a:off x="9448495" y="3278123"/>
-            <a:ext cx="2103120" cy="914400"/>
-          </a:xfrm>
-          <a:prstGeom prst="rect">
-            <a:avLst/>
-          </a:prstGeom>
-          <a:noFill/>
-        </p:spPr>
-        <p:txBody>
-          <a:bodyPr wrap="square" anchor="ctr"/>
-          <a:lstStyle/>
-          <a:p>
-            <a:pPr algn="l">
-              <a:lnSpc>
-                <a:spcPct val="110000"/>
-              </a:lnSpc>
-            </a:pPr>
-            <a:r>
-              <a:rPr sz="1250" b="1">
-                <a:solidFill>
-                  <a:srgbClr val="1A6FC4"/>
-                </a:solidFill>
-                <a:latin typeface="맑은 고딕"/>
-                <a:ea typeface="맑은 고딕"/>
-                <a:cs typeface="맑은 고딕"/>
-              </a:rPr>
-              <a:t>실패로 적는다</a:t>
-            </a:r>
-          </a:p>
-          <a:p>
-            <a:pPr algn="l">
-              <a:lnSpc>
-                <a:spcPct val="110000"/>
-              </a:lnSpc>
-            </a:pPr>
-            <a:r>
-              <a:rPr sz="1250" b="1">
-                <a:solidFill>
-                  <a:srgbClr val="1A6FC4"/>
-                </a:solidFill>
-                <a:latin typeface="맑은 고딕"/>
-                <a:ea typeface="맑은 고딕"/>
-                <a:cs typeface="맑은 고딕"/>
-              </a:rPr>
-              <a:t>0이나 빈 값으로 바꾸지 않는다</a:t>
-            </a:r>
-          </a:p>
-        </p:txBody>
-      </p:sp>
-      <p:sp>
-        <p:nvSpPr>
-          <p:cNvPr id="18" name="Rounded Rectangle 17"/>
-          <p:cNvSpPr/>
-          <p:nvPr/>
-        </p:nvSpPr>
-        <p:spPr>
-          <a:xfrm>
-            <a:off x="548640" y="4224527"/>
-            <a:ext cx="11094415" cy="850392"/>
-          </a:xfrm>
-          <a:prstGeom prst="roundRect">
-            <a:avLst>
-              <a:gd name="adj" fmla="val 8000"/>
-            </a:avLst>
-          </a:prstGeom>
-          <a:solidFill>
-            <a:srgbClr val="F3F6F9"/>
-          </a:solidFill>
-          <a:ln>
-            <a:noFill/>
-          </a:ln>
-        </p:spPr>
-        <p:txBody>
-          <a:bodyPr rtlCol="0" anchor="ctr"/>
-          <a:lstStyle/>
-          <a:p>
-            <a:pPr algn="ctr"/>
-          </a:p>
-        </p:txBody>
-      </p:sp>
-      <p:sp>
-        <p:nvSpPr>
           <p:cNvPr id="19" name="TextBox 18"/>
           <p:cNvSpPr txBox="1"/>
           <p:nvPr/>
@@ -21023,7 +21023,7 @@
             <a:r>
               <a:rPr sz="1250" b="1">
                 <a:solidFill>
-                  <a:srgbClr val="556175"/>
+                  <a:srgbClr val="1A6FC4"/>
                 </a:solidFill>
                 <a:latin typeface="맑은 고딕"/>
                 <a:ea typeface="맑은 고딕"/>
@@ -23705,7 +23705,7 @@
                 <a:ea typeface="맑은 고딕"/>
                 <a:cs typeface="맑은 고딕"/>
               </a:rPr>
-              <a:t>이 실습을 마치면 서로 다른 세 서버의 도구를 한 요청에서 이어 부른 호출 결과가 남는다.</a:t>
+              <a:t>서로 다른 세 서버의 도구도 한 요청 안에서 이어 부를 수 있으며, 그 호출 결과가 실습의 결과물이다.</a:t>
             </a:r>
           </a:p>
         </p:txBody>
@@ -24776,7 +24776,7 @@
                 <a:ea typeface="맑은 고딕"/>
                 <a:cs typeface="맑은 고딕"/>
               </a:rPr>
-              <a:t>이 실습을 마치면 직접 쓴 SKILL.md와, 그 스킬이 회의록에서 만들어 낸 작업 목록이 남는다.</a:t>
+              <a:t>직접 쓴 SKILL.md가 회의록에서 작업 목록을 만들어 내고, 그 목록은 회의록 원문과 대조해 검토한다.</a:t>
             </a:r>
           </a:p>
         </p:txBody>
@@ -29866,7 +29866,7 @@
                 <a:ea typeface="맑은 고딕"/>
                 <a:cs typeface="맑은 고딕"/>
               </a:rPr>
-              <a:t>연결 검사를 통과한 서버의 도구가 read_rows(표시 true), update_row(false), export(표시 없음)이다.</a:t>
+              <a:t>새로 등록한 서버의 도구 목록이 read_rows(표시 true), update_row(false), export(표시 없음)이다.</a:t>
             </a:r>
           </a:p>
         </p:txBody>
@@ -32589,7 +32589,7 @@
       </p:sp>
       <p:pic>
         <p:nvPicPr>
-          <p:cNvPr id="6" name="삽화:고리_1.svg" descr="illust_815611649989032360_1791735675.png"/>
+          <p:cNvPr id="6" name="삽화:고리_1.svg" descr="illust_276451549770328930_1791735675.png"/>
           <p:cNvPicPr>
             <a:picLocks noChangeAspect="1"/>
           </p:cNvPicPr>

--- a/docs/교재/실전반_오프라인/05회차/실전반_오프라인_05회차.pptx
+++ b/docs/교재/실전반_오프라인/05회차/실전반_오프라인_05회차.pptx
@@ -6414,7 +6414,7 @@
       </p:sp>
       <p:pic>
         <p:nvPicPr>
-          <p:cNvPr id="6" name="삽화:스킬문서.svg" descr="illust_2540520335921322077_1791735675.png"/>
+          <p:cNvPr id="6" name="삽화:스킬문서.svg" descr="illust_8618494905192877623_1791735675.png"/>
           <p:cNvPicPr>
             <a:picLocks noChangeAspect="1"/>
           </p:cNvPicPr>
@@ -9427,7 +9427,7 @@
       </p:sp>
       <p:pic>
         <p:nvPicPr>
-          <p:cNvPr id="6" name="삽화:연결의수.svg" descr="illust_806499503508165434_1791735675.png"/>
+          <p:cNvPr id="6" name="삽화:연결의수.svg" descr="illust_4002623911466861613_1791735675.png"/>
           <p:cNvPicPr>
             <a:picLocks noChangeAspect="1"/>
           </p:cNvPicPr>
@@ -10598,7 +10598,7 @@
       </p:sp>
       <p:pic>
         <p:nvPicPr>
-          <p:cNvPr id="6" name="삽화:MCP구성.svg" descr="illust_6170288006666810414_1791735675.png"/>
+          <p:cNvPr id="6" name="삽화:MCP구성.svg" descr="illust_7895401243946644091_1791735675.png"/>
           <p:cNvPicPr>
             <a:picLocks noChangeAspect="1"/>
           </p:cNvPicPr>
@@ -12113,7 +12113,7 @@
       </p:sp>
       <p:pic>
         <p:nvPicPr>
-          <p:cNvPr id="6" name="삽화:목록호출.svg" descr="illust_5398848434339159910_1791735675.png"/>
+          <p:cNvPr id="6" name="삽화:목록호출.svg" descr="illust_8666979273603102641_1791735675.png"/>
           <p:cNvPicPr>
             <a:picLocks noChangeAspect="1"/>
           </p:cNvPicPr>
@@ -19074,7 +19074,7 @@
       </p:sp>
       <p:pic>
         <p:nvPicPr>
-          <p:cNvPr id="6" name="삽화:세겹.svg" descr="illust_4690728014645083076_1791735675.png"/>
+          <p:cNvPr id="6" name="삽화:세겹.svg" descr="illust_7767050452001395299_1791735675.png"/>
           <p:cNvPicPr>
             <a:picLocks noChangeAspect="1"/>
           </p:cNvPicPr>
@@ -27875,7 +27875,7 @@
                 <a:ea typeface="맑은 고딕"/>
                 <a:cs typeface="맑은 고딕"/>
               </a:rPr>
-              <a:t>배운 내용을 바탕으로 정답을 맞춰보세요.</a:t>
+              <a:t>배운 내용을 바탕으로 정답을 맞혀 보세요.</a:t>
             </a:r>
           </a:p>
         </p:txBody>
@@ -32589,7 +32589,7 @@
       </p:sp>
       <p:pic>
         <p:nvPicPr>
-          <p:cNvPr id="6" name="삽화:고리_1.svg" descr="illust_276451549770328930_1791735675.png"/>
+          <p:cNvPr id="6" name="삽화:고리_1.svg" descr="illust_8854625145355686364_1791735675.png"/>
           <p:cNvPicPr>
             <a:picLocks noChangeAspect="1"/>
           </p:cNvPicPr>

--- a/docs/교재/실전반_오프라인/05회차/실전반_오프라인_05회차.pptx
+++ b/docs/교재/실전반_오프라인/05회차/실전반_오프라인_05회차.pptx
@@ -1802,7 +1802,7 @@
           <a:lstStyle/>
           <a:p>
             <a:r>
-              <a:t>둘째 실습은 VS Code의 Claude Code에서 진행합니다. 준비된 파일시스템, Git, 시간 서버를 각각 연결하고 접근 권한을 서버별로 정합니다. 서버마다 도구 목록과 호출 결과, 호출이 실패했을 때의 응답을 견준 뒤, 세 서버의 도구를 한 요청에서 이어 부릅니다.</a:t>
+              <a:t>둘째 실습은 VS Code의 AI 코딩 도구에서 진행합니다. 준비된 파일시스템, Git, 시간 서버를 각각 연결하고 접근 권한을 서버별로 정합니다. 서버마다 도구 목록과 호출 결과, 호출이 실패했을 때의 응답을 견준 뒤, 세 서버의 도구를 한 요청에서 이어 부릅니다.</a:t>
             </a:r>
           </a:p>
         </p:txBody>
@@ -6414,7 +6414,7 @@
       </p:sp>
       <p:pic>
         <p:nvPicPr>
-          <p:cNvPr id="6" name="삽화:스킬문서.svg" descr="illust_8618494905192877623_1791735675.png"/>
+          <p:cNvPr id="6" name="삽화:스킬문서.svg" descr="illust_8354115433428188224_1791735675.png"/>
           <p:cNvPicPr>
             <a:picLocks noChangeAspect="1"/>
           </p:cNvPicPr>
@@ -9427,7 +9427,7 @@
       </p:sp>
       <p:pic>
         <p:nvPicPr>
-          <p:cNvPr id="6" name="삽화:연결의수.svg" descr="illust_4002623911466861613_1791735675.png"/>
+          <p:cNvPr id="6" name="삽화:연결의수.svg" descr="illust_7990386299435787076_1791735675.png"/>
           <p:cNvPicPr>
             <a:picLocks noChangeAspect="1"/>
           </p:cNvPicPr>
@@ -10598,7 +10598,7 @@
       </p:sp>
       <p:pic>
         <p:nvPicPr>
-          <p:cNvPr id="6" name="삽화:MCP구성.svg" descr="illust_7895401243946644091_1791735675.png"/>
+          <p:cNvPr id="6" name="삽화:MCP구성.svg" descr="illust_5434447762979575936_1791735675.png"/>
           <p:cNvPicPr>
             <a:picLocks noChangeAspect="1"/>
           </p:cNvPicPr>
@@ -12113,7 +12113,7 @@
       </p:sp>
       <p:pic>
         <p:nvPicPr>
-          <p:cNvPr id="6" name="삽화:목록호출.svg" descr="illust_8666979273603102641_1791735675.png"/>
+          <p:cNvPr id="6" name="삽화:목록호출.svg" descr="illust_813506679914847798_1791735675.png"/>
           <p:cNvPicPr>
             <a:picLocks noChangeAspect="1"/>
           </p:cNvPicPr>
@@ -19074,7 +19074,7 @@
       </p:sp>
       <p:pic>
         <p:nvPicPr>
-          <p:cNvPr id="6" name="삽화:세겹.svg" descr="illust_7767050452001395299_1791735675.png"/>
+          <p:cNvPr id="6" name="삽화:세겹.svg" descr="illust_4126659624030372304_1791735675.png"/>
           <p:cNvPicPr>
             <a:picLocks noChangeAspect="1"/>
           </p:cNvPicPr>
@@ -23601,7 +23601,7 @@
                 <a:ea typeface="맑은 고딕"/>
                 <a:cs typeface="맑은 고딕"/>
               </a:rPr>
-              <a:t>Claude Code에 파일시스템, Git, 시간 서버를 연결하고 한 요청에서 조합한다</a:t>
+              <a:t>AI 코딩 도구에 파일시스템, Git, 시간 서버를 연결하고 한 요청에서 조합한다</a:t>
             </a:r>
           </a:p>
         </p:txBody>
@@ -32589,7 +32589,7 @@
       </p:sp>
       <p:pic>
         <p:nvPicPr>
-          <p:cNvPr id="6" name="삽화:고리_1.svg" descr="illust_8854625145355686364_1791735675.png"/>
+          <p:cNvPr id="6" name="삽화:고리_1.svg" descr="illust_2438721878296084056_1791735675.png"/>
           <p:cNvPicPr>
             <a:picLocks noChangeAspect="1"/>
           </p:cNvPicPr>
